--- a/cheatsheets/sentiment-classifier-cheatsheet.pptx
+++ b/cheatsheets/sentiment-classifier-cheatsheet.pptx
@@ -6256,7 +6256,7 @@
                 <a:cs typeface="Source Sans 3"/>
                 <a:sym typeface="Source Sans 3"/>
               </a:rPr>
-              <a:t> covers how to add sentiment labels to each comment, by using machine learning classifiers for sentiment analysis.</a:t>
+              <a:t> covers how to add sentiment labels to each comment by using machine learning classifiers for sentiment analysis.</a:t>
             </a:r>
           </a:p>
         </p:txBody>
@@ -6960,8 +6960,8 @@
         </p:nvSpPr>
         <p:spPr>
           <a:xfrm>
-            <a:off x="3780432" y="10244241"/>
-            <a:ext cx="10200052" cy="568314"/>
+            <a:off x="6644897" y="10244241"/>
+            <a:ext cx="7325103" cy="497526"/>
           </a:xfrm>
           <a:prstGeom prst="rect">
             <a:avLst/>
@@ -6986,22 +6986,28 @@
               </a:spcBef>
             </a:pPr>
             <a:r>
-              <a:rPr lang="en" sz="1400" u="sng" dirty="0">
-                <a:solidFill>
-                  <a:schemeClr val="hlink"/>
+              <a:rPr lang="en" sz="1000" u="sng" dirty="0">
+                <a:solidFill>
+                  <a:schemeClr val="bg2"/>
                 </a:solidFill>
                 <a:latin typeface="Source Sans 3"/>
                 <a:ea typeface="Source Sans 3"/>
                 <a:cs typeface="Source Sans 3"/>
                 <a:sym typeface="Source Sans 3"/>
-                <a:hlinkClick r:id="rId6"/>
+                <a:hlinkClick r:id="rId6">
+                  <a:extLst>
+                    <a:ext uri="{A12FA001-AC4F-418D-AE19-62706E023703}">
+                      <ahyp:hlinkClr xmlns:ahyp="http://schemas.microsoft.com/office/drawing/2018/hyperlinkcolor" val="tx"/>
+                    </a:ext>
+                  </a:extLst>
+                </a:hlinkClick>
               </a:rPr>
               <a:t>CC BY SA</a:t>
             </a:r>
             <a:r>
-              <a:rPr lang="en" sz="1400" dirty="0">
-                <a:solidFill>
-                  <a:schemeClr val="hlink"/>
+              <a:rPr lang="en" sz="1000" dirty="0">
+                <a:solidFill>
+                  <a:schemeClr val="bg2"/>
                 </a:solidFill>
                 <a:uFill>
                   <a:noFill/>
@@ -7010,12 +7016,18 @@
                 <a:ea typeface="Source Sans 3"/>
                 <a:cs typeface="Source Sans 3"/>
                 <a:sym typeface="Source Sans 3"/>
-                <a:hlinkClick r:id="rId6"/>
+                <a:hlinkClick r:id="rId6">
+                  <a:extLst>
+                    <a:ext uri="{A12FA001-AC4F-418D-AE19-62706E023703}">
+                      <ahyp:hlinkClr xmlns:ahyp="http://schemas.microsoft.com/office/drawing/2018/hyperlinkcolor" val="tx"/>
+                    </a:ext>
+                  </a:extLst>
+                </a:hlinkClick>
               </a:rPr>
               <a:t> </a:t>
             </a:r>
             <a:r>
-              <a:rPr lang="en" sz="1400" dirty="0">
+              <a:rPr lang="en" sz="1000" dirty="0">
                 <a:solidFill>
                   <a:srgbClr val="4C4C4C"/>
                 </a:solidFill>
@@ -7026,7 +7038,7 @@
               </a:rPr>
               <a:t>Adam Graham, Samantha Limon, Carlos Paradis • Kaiaulu package version 0.0.0.9700 (in development) •  Updated: 2026-4</a:t>
             </a:r>
-            <a:endParaRPr sz="1400" dirty="0">
+            <a:endParaRPr sz="1000" dirty="0">
               <a:solidFill>
                 <a:srgbClr val="4C4C4C"/>
               </a:solidFill>
@@ -10522,7 +10534,7 @@
         </p:nvSpPr>
         <p:spPr>
           <a:xfrm>
-            <a:off x="5703039" y="6314089"/>
+            <a:off x="5703039" y="6317265"/>
             <a:ext cx="572742" cy="157250"/>
           </a:xfrm>
           <a:prstGeom prst="rect">
